--- a/docs/reports/pllsim-项目总结-v0.9.4.pptx
+++ b/docs/reports/pllsim-项目总结-v0.9.4.pptx
@@ -1708,7 +1708,7 @@
                 <a:ea typeface="Microsoft YaHei" pitchFamily="34" charset="-122"/>
                 <a:cs typeface="Microsoft YaHei" pitchFamily="34" charset="-120"/>
               </a:rPr>
-              <a:t>v0.9.4    ·    6 种架构    ·    958 项自动化测试</a:t>
+              <a:t>v0.9.4    ·    6 种架构    ·    962 项自动化测试</a:t>
             </a:r>
             <a:endParaRPr lang="en-US" sz="1400" dirty="0"/>
           </a:p>
@@ -2737,7 +2737,7 @@
                 <a:ea typeface="Microsoft YaHei" pitchFamily="34" charset="-122"/>
                 <a:cs typeface="Microsoft YaHei" pitchFamily="34" charset="-120"/>
               </a:rPr>
-              <a:t>958</a:t>
+              <a:t>962</a:t>
             </a:r>
             <a:endParaRPr lang="en-US" sz="3400" dirty="0"/>
           </a:p>
@@ -8051,7 +8051,7 @@
                 <a:ea typeface="Microsoft YaHei" pitchFamily="34" charset="-122"/>
                 <a:cs typeface="Microsoft YaHei" pitchFamily="34" charset="-120"/>
               </a:rPr>
-              <a:t>958 项自动化测试，每次代码提交在两个 Python 版本上全量运行</a:t>
+              <a:t>962 项自动化测试，每次代码提交在两个 Python 版本上全量运行</a:t>
             </a:r>
             <a:endParaRPr lang="en-US" sz="1400" dirty="0"/>
           </a:p>
@@ -8754,7 +8754,7 @@
                 <a:ea typeface="Microsoft YaHei" pitchFamily="34" charset="-122"/>
                 <a:cs typeface="Microsoft YaHei" pitchFamily="34" charset="-120"/>
               </a:rPr>
-              <a:t>14 个版本全部带发布说明：每一个变动的数字都写明「哪个数变了、为什么」，不悄悄改基准。</a:t>
+              <a:t>16 个版本全部带发布说明：每一个变动的数字都写明「哪个数变了、为什么」，不悄悄改基准。</a:t>
             </a:r>
             <a:endParaRPr lang="en-US" sz="1450" dirty="0"/>
           </a:p>
